--- a/examples/02-saas-product-demo.pptx
+++ b/examples/02-saas-product-demo.pptx
@@ -3446,7 +3446,7 @@
               </a:defRPr>
             </a:pPr>
             <a:r>
-              <a:t>{Attention hook}</a:t>
+              <a:t>Introducing CloudFlow Platform</a:t>
             </a:r>
           </a:p>
         </p:txBody>
@@ -3482,7 +3482,7 @@
               </a:defRPr>
             </a:pPr>
             <a:r>
-              <a:t>{Interesting detail}. {Desirable outcome}.</a:t>
+              <a:t>CloudFlow — Innovation that delivers</a:t>
             </a:r>
           </a:p>
         </p:txBody>
@@ -3642,7 +3642,7 @@
               </a:defRPr>
             </a:pPr>
             <a:r>
-              <a:t>你正面临{问题}</a:t>
+              <a:t>The problem is bigger than you think</a:t>
             </a:r>
           </a:p>
         </p:txBody>
@@ -3678,15 +3678,15 @@
               </a:defRPr>
             </a:pPr>
             <a:r>
-              <a:t>• Manual Workflows</a:t>
+              <a:t>• Manual Workflows: Teams waste 30% of time on repetitive tasks</a:t>
             </a:r>
             <a:br/>
             <a:r>
-              <a:t>• Tool Sprawl</a:t>
+              <a:t>• Tool Sprawl: Average team uses 12+ disconnected tools</a:t>
             </a:r>
             <a:br/>
             <a:r>
-              <a:t>• No Visibility</a:t>
+              <a:t>• No Visibility: Managers can't see what's actually happening</a:t>
             </a:r>
           </a:p>
         </p:txBody>
@@ -3749,7 +3749,7 @@
               </a:defRPr>
             </a:pPr>
             <a:r>
-              <a:t>{Feature}让你{Advantage}</a:t>
+              <a:t>Intelligent Workflow Automation</a:t>
             </a:r>
           </a:p>
         </p:txBody>
@@ -3785,15 +3785,15 @@
               </a:defRPr>
             </a:pPr>
             <a:r>
-              <a:t>• [solution 要点1]</a:t>
+              <a:t>• Eliminates: Teams waste 30% of time on repetitive tasks</a:t>
             </a:r>
             <a:br/>
             <a:r>
-              <a:t>• [solution 要点2]</a:t>
+              <a:t>• Eliminates: Average team uses 12+ disconnected tools</a:t>
             </a:r>
             <a:br/>
             <a:r>
-              <a:t>• [solution 要点3]</a:t>
+              <a:t>• Eliminates: Managers can't see what's actually happening</a:t>
             </a:r>
           </a:p>
         </p:txBody>
@@ -3856,7 +3856,7 @@
               </a:defRPr>
             </a:pPr>
             <a:r>
-              <a:t>{Feature}</a:t>
+              <a:t>Built for how you actually work</a:t>
             </a:r>
           </a:p>
         </p:txBody>
@@ -3910,7 +3910,7 @@
               </a:defRPr>
             </a:pPr>
             <a:r>
-              <a:t>[features 要点1]</a:t>
+              <a:t>Visual workflow builder</a:t>
             </a:r>
           </a:p>
         </p:txBody>
@@ -3964,7 +3964,7 @@
               </a:defRPr>
             </a:pPr>
             <a:r>
-              <a:t>[features 要点2]</a:t>
+              <a:t>500+ native integrations</a:t>
             </a:r>
           </a:p>
         </p:txBody>
@@ -4018,7 +4018,7 @@
               </a:defRPr>
             </a:pPr>
             <a:r>
-              <a:t>[features 要点3]</a:t>
+              <a:t>AI-powered optimization</a:t>
             </a:r>
           </a:p>
         </p:txBody>
@@ -4142,7 +4142,7 @@
               </a:defRPr>
             </a:pPr>
             <a:r>
-              <a:t>[图片: abstract]</a:t>
+              <a:t>[图片: product demo screenshot interface]</a:t>
             </a:r>
           </a:p>
         </p:txBody>
@@ -4178,7 +4178,7 @@
               </a:defRPr>
             </a:pPr>
             <a:r>
-              <a:t>{Attention hook}</a:t>
+              <a:t>See CloudFlow Platform in action</a:t>
             </a:r>
           </a:p>
         </p:txBody>
@@ -4214,15 +4214,15 @@
               </a:defRPr>
             </a:pPr>
             <a:r>
-              <a:t>• [demo 要点1]</a:t>
+              <a:t>• Step 1: Connect your data sources with one click</a:t>
             </a:r>
             <a:br/>
             <a:r>
-              <a:t>• [demo 要点2]</a:t>
+              <a:t>• Step 2: Configure intelligent workflows visually</a:t>
             </a:r>
             <a:br/>
             <a:r>
-              <a:t>• [demo 要点3]</a:t>
+              <a:t>• Step 3: Watch AI optimize and deliver results</a:t>
             </a:r>
           </a:p>
         </p:txBody>
@@ -4285,7 +4285,7 @@
               </a:defRPr>
             </a:pPr>
             <a:r>
-              <a:t>{N}+用户信赖{产品}</a:t>
+              <a:t>Trusted by industry leaders</a:t>
             </a:r>
           </a:p>
         </p:txBody>
@@ -4321,15 +4321,15 @@
               </a:defRPr>
             </a:pPr>
             <a:r>
-              <a:t>• [testimonials 要点1]</a:t>
+              <a:t>• Reduced processing time by 85% within first month</a:t>
             </a:r>
             <a:br/>
             <a:r>
-              <a:t>• [testimonials 要点2]</a:t>
+              <a:t>• Saved $1.2M annually in operational costs</a:t>
             </a:r>
             <a:br/>
             <a:r>
-              <a:t>• [testimonials 要点3]</a:t>
+              <a:t>• Team satisfaction scores increased by 40%</a:t>
             </a:r>
           </a:p>
         </p:txBody>
@@ -4392,7 +4392,7 @@
               </a:defRPr>
             </a:pPr>
             <a:r>
-              <a:t>选择适合你的方案</a:t>
+              <a:t>Simple, transparent pricing</a:t>
             </a:r>
           </a:p>
         </p:txBody>
@@ -4428,15 +4428,15 @@
               </a:defRPr>
             </a:pPr>
             <a:r>
-              <a:t>• [pricing 要点1]</a:t>
+              <a:t>• Starter: Free for teams up to 5 — full features</a:t>
             </a:r>
             <a:br/>
             <a:r>
-              <a:t>• [pricing 要点2]</a:t>
+              <a:t>• Pro: $29/user/mo — advanced automation + priority support</a:t>
             </a:r>
             <a:br/>
             <a:r>
-              <a:t>• [pricing 要点3]</a:t>
+              <a:t>• Enterprise: Custom — SSO, audit logs, dedicated CSM</a:t>
             </a:r>
           </a:p>
         </p:txBody>
@@ -4499,7 +4499,7 @@
               </a:defRPr>
             </a:pPr>
             <a:r>
-              <a:t>立即{行动}</a:t>
+              <a:t>Try CloudFlow Platform free</a:t>
             </a:r>
           </a:p>
         </p:txBody>
@@ -4535,7 +4535,7 @@
               </a:defRPr>
             </a:pPr>
             <a:r>
-              <a:t>限时{优惠}。</a:t>
+              <a:t>14-day free trial. No credit card required.</a:t>
             </a:r>
           </a:p>
         </p:txBody>
@@ -4594,7 +4594,7 @@
               </a:defRPr>
             </a:pPr>
             <a:r>
-              <a:t>立即{行动}</a:t>
+              <a:t>Try CloudFlow Platform free</a:t>
             </a:r>
           </a:p>
         </p:txBody>

--- a/examples/02-saas-product-demo.pptx
+++ b/examples/02-saas-product-demo.pptx
@@ -3417,7 +3417,50 @@
       <p:grpSpPr/>
       <p:sp>
         <p:nvSpPr>
-          <p:cNvPr id="2" name="TextBox 1"/>
+          <p:cNvPr id="2" name="Rectangle 1"/>
+          <p:cNvSpPr/>
+          <p:nvPr/>
+        </p:nvSpPr>
+        <p:spPr>
+          <a:xfrm>
+            <a:off x="0" y="2560320"/>
+            <a:ext cx="12191695" cy="54864"/>
+          </a:xfrm>
+          <a:prstGeom prst="rect">
+            <a:avLst/>
+          </a:prstGeom>
+          <a:solidFill>
+            <a:srgbClr val="F97316"/>
+          </a:solidFill>
+          <a:ln>
+            <a:noFill/>
+          </a:ln>
+        </p:spPr>
+        <p:style>
+          <a:lnRef idx="1">
+            <a:schemeClr val="accent1"/>
+          </a:lnRef>
+          <a:fillRef idx="3">
+            <a:schemeClr val="accent1"/>
+          </a:fillRef>
+          <a:effectRef idx="2">
+            <a:schemeClr val="accent1"/>
+          </a:effectRef>
+          <a:fontRef idx="minor">
+            <a:schemeClr val="lt1"/>
+          </a:fontRef>
+        </p:style>
+        <p:txBody>
+          <a:bodyPr rtlCol="0" anchor="ctr"/>
+          <a:lstStyle/>
+          <a:p>
+            <a:pPr algn="ctr"/>
+          </a:p>
+        </p:txBody>
+      </p:sp>
+      <p:sp>
+        <p:nvSpPr>
+          <p:cNvPr id="3" name="TextBox 2"/>
           <p:cNvSpPr txBox="1"/>
           <p:nvPr/>
         </p:nvSpPr>
@@ -3453,7 +3496,7 @@
       </p:sp>
       <p:sp>
         <p:nvSpPr>
-          <p:cNvPr id="3" name="TextBox 2"/>
+          <p:cNvPr id="4" name="TextBox 3"/>
           <p:cNvSpPr txBox="1"/>
           <p:nvPr/>
         </p:nvSpPr>
@@ -3489,22 +3532,22 @@
       </p:sp>
       <p:sp>
         <p:nvSpPr>
-          <p:cNvPr id="4" name="Rectangle 3"/>
+          <p:cNvPr id="5" name="Rounded Rectangle 4"/>
           <p:cNvSpPr/>
           <p:nvPr/>
         </p:nvSpPr>
         <p:spPr>
           <a:xfrm>
-            <a:off x="5410504" y="274320"/>
+            <a:off x="5410504" y="365760"/>
             <a:ext cx="1371600" cy="457200"/>
           </a:xfrm>
-          <a:prstGeom prst="rect">
+          <a:prstGeom prst="roundRect">
             <a:avLst/>
           </a:prstGeom>
           <a:solidFill>
             <a:srgbClr val="F1F5F9"/>
           </a:solidFill>
-          <a:ln>
+          <a:ln w="12700">
             <a:solidFill>
               <a:srgbClr val="E2E8F0"/>
             </a:solidFill>
@@ -3536,7 +3579,7 @@
               </a:defRPr>
             </a:pPr>
             <a:r>
-              <a:t>[图片: abstract technology innovation]</a:t>
+              <a:t>abstract technology innovation</a:t>
             </a:r>
           </a:p>
         </p:txBody>
@@ -3577,7 +3620,7 @@
         <p:spPr>
           <a:xfrm>
             <a:off x="0" y="0"/>
-            <a:ext cx="12191695" cy="73152"/>
+            <a:ext cx="12191695" cy="54864"/>
           </a:xfrm>
           <a:prstGeom prst="rect">
             <a:avLst/>
@@ -3613,14 +3656,57 @@
       </p:sp>
       <p:sp>
         <p:nvSpPr>
-          <p:cNvPr id="3" name="TextBox 2"/>
+          <p:cNvPr id="3" name="Rectangle 2"/>
+          <p:cNvSpPr/>
+          <p:nvPr/>
+        </p:nvSpPr>
+        <p:spPr>
+          <a:xfrm>
+            <a:off x="0" y="0"/>
+            <a:ext cx="73152" cy="6858000"/>
+          </a:xfrm>
+          <a:prstGeom prst="rect">
+            <a:avLst/>
+          </a:prstGeom>
+          <a:solidFill>
+            <a:srgbClr val="2563EB"/>
+          </a:solidFill>
+          <a:ln>
+            <a:noFill/>
+          </a:ln>
+        </p:spPr>
+        <p:style>
+          <a:lnRef idx="1">
+            <a:schemeClr val="accent1"/>
+          </a:lnRef>
+          <a:fillRef idx="3">
+            <a:schemeClr val="accent1"/>
+          </a:fillRef>
+          <a:effectRef idx="2">
+            <a:schemeClr val="accent1"/>
+          </a:effectRef>
+          <a:fontRef idx="minor">
+            <a:schemeClr val="lt1"/>
+          </a:fontRef>
+        </p:style>
+        <p:txBody>
+          <a:bodyPr rtlCol="0" anchor="ctr"/>
+          <a:lstStyle/>
+          <a:p>
+            <a:pPr algn="ctr"/>
+          </a:p>
+        </p:txBody>
+      </p:sp>
+      <p:sp>
+        <p:nvSpPr>
+          <p:cNvPr id="4" name="TextBox 3"/>
           <p:cNvSpPr txBox="1"/>
           <p:nvPr/>
         </p:nvSpPr>
         <p:spPr>
           <a:xfrm>
-            <a:off x="685800" y="365760"/>
-            <a:ext cx="10820095" cy="731520"/>
+            <a:off x="822960" y="457200"/>
+            <a:ext cx="10545775" cy="640080"/>
           </a:xfrm>
           <a:prstGeom prst="rect">
             <a:avLst/>
@@ -3649,14 +3735,57 @@
       </p:sp>
       <p:sp>
         <p:nvSpPr>
-          <p:cNvPr id="4" name="TextBox 3"/>
+          <p:cNvPr id="5" name="Rectangle 4"/>
+          <p:cNvSpPr/>
+          <p:nvPr/>
+        </p:nvSpPr>
+        <p:spPr>
+          <a:xfrm>
+            <a:off x="822960" y="1143000"/>
+            <a:ext cx="1828800" cy="36576"/>
+          </a:xfrm>
+          <a:prstGeom prst="rect">
+            <a:avLst/>
+          </a:prstGeom>
+          <a:solidFill>
+            <a:srgbClr val="F97316"/>
+          </a:solidFill>
+          <a:ln>
+            <a:noFill/>
+          </a:ln>
+        </p:spPr>
+        <p:style>
+          <a:lnRef idx="1">
+            <a:schemeClr val="accent1"/>
+          </a:lnRef>
+          <a:fillRef idx="3">
+            <a:schemeClr val="accent1"/>
+          </a:fillRef>
+          <a:effectRef idx="2">
+            <a:schemeClr val="accent1"/>
+          </a:effectRef>
+          <a:fontRef idx="minor">
+            <a:schemeClr val="lt1"/>
+          </a:fontRef>
+        </p:style>
+        <p:txBody>
+          <a:bodyPr rtlCol="0" anchor="ctr"/>
+          <a:lstStyle/>
+          <a:p>
+            <a:pPr algn="ctr"/>
+          </a:p>
+        </p:txBody>
+      </p:sp>
+      <p:sp>
+        <p:nvSpPr>
+          <p:cNvPr id="6" name="TextBox 5"/>
           <p:cNvSpPr txBox="1"/>
           <p:nvPr/>
         </p:nvSpPr>
         <p:spPr>
           <a:xfrm>
-            <a:off x="685800" y="1371600"/>
-            <a:ext cx="10820095" cy="4572000"/>
+            <a:off x="822960" y="1463040"/>
+            <a:ext cx="6400800" cy="4572000"/>
           </a:xfrm>
           <a:prstGeom prst="rect">
             <a:avLst/>
@@ -3669,7 +3798,13 @@
           </a:bodyPr>
           <a:lstStyle/>
           <a:p>
-            <a:pPr algn="l">
+            <a:pPr lvl="1" algn="l">
+              <a:spcBef>
+                <a:spcPts val="400"/>
+              </a:spcBef>
+              <a:spcAft>
+                <a:spcPts val="800"/>
+              </a:spcAft>
               <a:defRPr sz="1600" b="0">
                 <a:solidFill>
                   <a:srgbClr val="1E293B"/>
@@ -3678,15 +3813,99 @@
               </a:defRPr>
             </a:pPr>
             <a:r>
-              <a:t>• Manual Workflows: Teams waste 30% of time on repetitive tasks</a:t>
-            </a:r>
-            <a:br/>
-            <a:r>
-              <a:t>• Tool Sprawl: Average team uses 12+ disconnected tools</a:t>
-            </a:r>
-            <a:br/>
-            <a:r>
-              <a:t>• No Visibility: Managers can't see what's actually happening</a:t>
+              <a:t>Manual Workflows: Teams waste 30% of time on repetitive tasks</a:t>
+            </a:r>
+          </a:p>
+          <a:p>
+            <a:pPr lvl="1" algn="l">
+              <a:spcBef>
+                <a:spcPts val="400"/>
+              </a:spcBef>
+              <a:spcAft>
+                <a:spcPts val="800"/>
+              </a:spcAft>
+              <a:defRPr sz="1600" b="0">
+                <a:solidFill>
+                  <a:srgbClr val="1E293B"/>
+                </a:solidFill>
+                <a:latin typeface="Inter"/>
+              </a:defRPr>
+            </a:pPr>
+            <a:r>
+              <a:t>Tool Sprawl: Average team uses 12+ disconnected tools</a:t>
+            </a:r>
+          </a:p>
+          <a:p>
+            <a:pPr lvl="1" algn="l">
+              <a:spcBef>
+                <a:spcPts val="400"/>
+              </a:spcBef>
+              <a:spcAft>
+                <a:spcPts val="800"/>
+              </a:spcAft>
+              <a:defRPr sz="1600" b="0">
+                <a:solidFill>
+                  <a:srgbClr val="1E293B"/>
+                </a:solidFill>
+                <a:latin typeface="Inter"/>
+              </a:defRPr>
+            </a:pPr>
+            <a:r>
+              <a:t>No Visibility: Managers can't see what's actually happening</a:t>
+            </a:r>
+          </a:p>
+        </p:txBody>
+      </p:sp>
+      <p:sp>
+        <p:nvSpPr>
+          <p:cNvPr id="7" name="Rounded Rectangle 6"/>
+          <p:cNvSpPr/>
+          <p:nvPr/>
+        </p:nvSpPr>
+        <p:spPr>
+          <a:xfrm>
+            <a:off x="7772400" y="1463040"/>
+            <a:ext cx="3657600" cy="4572000"/>
+          </a:xfrm>
+          <a:prstGeom prst="roundRect">
+            <a:avLst/>
+          </a:prstGeom>
+          <a:solidFill>
+            <a:srgbClr val="F1F5F9"/>
+          </a:solidFill>
+          <a:ln w="12700">
+            <a:solidFill>
+              <a:srgbClr val="E2E8F0"/>
+            </a:solidFill>
+          </a:ln>
+        </p:spPr>
+        <p:style>
+          <a:lnRef idx="1">
+            <a:schemeClr val="accent1"/>
+          </a:lnRef>
+          <a:fillRef idx="3">
+            <a:schemeClr val="accent1"/>
+          </a:fillRef>
+          <a:effectRef idx="2">
+            <a:schemeClr val="accent1"/>
+          </a:effectRef>
+          <a:fontRef idx="minor">
+            <a:schemeClr val="lt1"/>
+          </a:fontRef>
+        </p:style>
+        <p:txBody>
+          <a:bodyPr rtlCol="0" anchor="ctr" wrap="square"/>
+          <a:lstStyle/>
+          <a:p>
+            <a:pPr algn="ctr">
+              <a:defRPr sz="1200">
+                <a:solidFill>
+                  <a:srgbClr val="94A3B8"/>
+                </a:solidFill>
+              </a:defRPr>
+            </a:pPr>
+            <a:r>
+              <a:t>frustration stress problem dark</a:t>
             </a:r>
           </a:p>
         </p:txBody>
@@ -3726,8 +3945,8 @@
         </p:nvSpPr>
         <p:spPr>
           <a:xfrm>
-            <a:off x="685800" y="365760"/>
-            <a:ext cx="10820095" cy="731520"/>
+            <a:off x="822960" y="457200"/>
+            <a:ext cx="10545775" cy="640080"/>
           </a:xfrm>
           <a:prstGeom prst="rect">
             <a:avLst/>
@@ -3756,45 +3975,344 @@
       </p:sp>
       <p:sp>
         <p:nvSpPr>
-          <p:cNvPr id="3" name="TextBox 2"/>
-          <p:cNvSpPr txBox="1"/>
+          <p:cNvPr id="3" name="Rectangle 2"/>
+          <p:cNvSpPr/>
           <p:nvPr/>
         </p:nvSpPr>
         <p:spPr>
           <a:xfrm>
-            <a:off x="685800" y="1371600"/>
-            <a:ext cx="10820095" cy="4572000"/>
+            <a:off x="822960" y="1143000"/>
+            <a:ext cx="1828800" cy="36576"/>
           </a:xfrm>
           <a:prstGeom prst="rect">
             <a:avLst/>
           </a:prstGeom>
-          <a:noFill/>
-        </p:spPr>
-        <p:txBody>
-          <a:bodyPr wrap="square">
-            <a:spAutoFit/>
-          </a:bodyPr>
+          <a:solidFill>
+            <a:srgbClr val="F97316"/>
+          </a:solidFill>
+          <a:ln>
+            <a:noFill/>
+          </a:ln>
+        </p:spPr>
+        <p:style>
+          <a:lnRef idx="1">
+            <a:schemeClr val="accent1"/>
+          </a:lnRef>
+          <a:fillRef idx="3">
+            <a:schemeClr val="accent1"/>
+          </a:fillRef>
+          <a:effectRef idx="2">
+            <a:schemeClr val="accent1"/>
+          </a:effectRef>
+          <a:fontRef idx="minor">
+            <a:schemeClr val="lt1"/>
+          </a:fontRef>
+        </p:style>
+        <p:txBody>
+          <a:bodyPr rtlCol="0" anchor="ctr"/>
+          <a:lstStyle/>
+          <a:p>
+            <a:pPr algn="ctr"/>
+          </a:p>
+        </p:txBody>
+      </p:sp>
+      <p:sp>
+        <p:nvSpPr>
+          <p:cNvPr id="4" name="Rounded Rectangle 3"/>
+          <p:cNvSpPr/>
+          <p:nvPr/>
+        </p:nvSpPr>
+        <p:spPr>
+          <a:xfrm>
+            <a:off x="822960" y="1554480"/>
+            <a:ext cx="3332073" cy="4389120"/>
+          </a:xfrm>
+          <a:prstGeom prst="roundRect">
+            <a:avLst/>
+          </a:prstGeom>
+          <a:solidFill>
+            <a:srgbClr val="F1F5F9"/>
+          </a:solidFill>
+          <a:ln w="12700">
+            <a:solidFill>
+              <a:srgbClr val="E2E8F0"/>
+            </a:solidFill>
+          </a:ln>
+        </p:spPr>
+        <p:style>
+          <a:lnRef idx="1">
+            <a:schemeClr val="accent1"/>
+          </a:lnRef>
+          <a:fillRef idx="3">
+            <a:schemeClr val="accent1"/>
+          </a:fillRef>
+          <a:effectRef idx="2">
+            <a:schemeClr val="accent1"/>
+          </a:effectRef>
+          <a:fontRef idx="minor">
+            <a:schemeClr val="lt1"/>
+          </a:fontRef>
+        </p:style>
+        <p:txBody>
+          <a:bodyPr rtlCol="0" anchor="ctr" wrap="square" lIns="228600" rIns="228600" tIns="457200"/>
           <a:lstStyle/>
           <a:p>
             <a:pPr algn="l">
-              <a:defRPr sz="1600" b="0">
+              <a:spcAft>
+                <a:spcPts val="600"/>
+              </a:spcAft>
+              <a:defRPr sz="1400">
                 <a:solidFill>
                   <a:srgbClr val="1E293B"/>
                 </a:solidFill>
-                <a:latin typeface="Inter"/>
               </a:defRPr>
             </a:pPr>
             <a:r>
-              <a:t>• Eliminates: Teams waste 30% of time on repetitive tasks</a:t>
-            </a:r>
-            <a:br/>
-            <a:r>
-              <a:t>• Eliminates: Average team uses 12+ disconnected tools</a:t>
-            </a:r>
-            <a:br/>
-            <a:r>
-              <a:t>• Eliminates: Managers can't see what's actually happening</a:t>
-            </a:r>
+              <a:t>Eliminates: Teams waste 30% of time on repetitive tasks</a:t>
+            </a:r>
+          </a:p>
+        </p:txBody>
+      </p:sp>
+      <p:sp>
+        <p:nvSpPr>
+          <p:cNvPr id="5" name="Rectangle 4"/>
+          <p:cNvSpPr/>
+          <p:nvPr/>
+        </p:nvSpPr>
+        <p:spPr>
+          <a:xfrm>
+            <a:off x="960120" y="1737360"/>
+            <a:ext cx="457200" cy="54864"/>
+          </a:xfrm>
+          <a:prstGeom prst="rect">
+            <a:avLst/>
+          </a:prstGeom>
+          <a:solidFill>
+            <a:srgbClr val="F97316"/>
+          </a:solidFill>
+          <a:ln>
+            <a:noFill/>
+          </a:ln>
+        </p:spPr>
+        <p:style>
+          <a:lnRef idx="1">
+            <a:schemeClr val="accent1"/>
+          </a:lnRef>
+          <a:fillRef idx="3">
+            <a:schemeClr val="accent1"/>
+          </a:fillRef>
+          <a:effectRef idx="2">
+            <a:schemeClr val="accent1"/>
+          </a:effectRef>
+          <a:fontRef idx="minor">
+            <a:schemeClr val="lt1"/>
+          </a:fontRef>
+        </p:style>
+        <p:txBody>
+          <a:bodyPr rtlCol="0" anchor="ctr"/>
+          <a:lstStyle/>
+          <a:p>
+            <a:pPr algn="ctr"/>
+          </a:p>
+        </p:txBody>
+      </p:sp>
+      <p:sp>
+        <p:nvSpPr>
+          <p:cNvPr id="6" name="Rounded Rectangle 5"/>
+          <p:cNvSpPr/>
+          <p:nvPr/>
+        </p:nvSpPr>
+        <p:spPr>
+          <a:xfrm>
+            <a:off x="4429353" y="1554480"/>
+            <a:ext cx="3332073" cy="4389120"/>
+          </a:xfrm>
+          <a:prstGeom prst="roundRect">
+            <a:avLst/>
+          </a:prstGeom>
+          <a:solidFill>
+            <a:srgbClr val="F1F5F9"/>
+          </a:solidFill>
+          <a:ln w="12700">
+            <a:solidFill>
+              <a:srgbClr val="E2E8F0"/>
+            </a:solidFill>
+          </a:ln>
+        </p:spPr>
+        <p:style>
+          <a:lnRef idx="1">
+            <a:schemeClr val="accent1"/>
+          </a:lnRef>
+          <a:fillRef idx="3">
+            <a:schemeClr val="accent1"/>
+          </a:fillRef>
+          <a:effectRef idx="2">
+            <a:schemeClr val="accent1"/>
+          </a:effectRef>
+          <a:fontRef idx="minor">
+            <a:schemeClr val="lt1"/>
+          </a:fontRef>
+        </p:style>
+        <p:txBody>
+          <a:bodyPr rtlCol="0" anchor="ctr" wrap="square" lIns="228600" rIns="228600" tIns="457200"/>
+          <a:lstStyle/>
+          <a:p>
+            <a:pPr algn="l">
+              <a:spcAft>
+                <a:spcPts val="600"/>
+              </a:spcAft>
+              <a:defRPr sz="1400">
+                <a:solidFill>
+                  <a:srgbClr val="1E293B"/>
+                </a:solidFill>
+              </a:defRPr>
+            </a:pPr>
+            <a:r>
+              <a:t>Eliminates: Average team uses 12+ disconnected tools</a:t>
+            </a:r>
+          </a:p>
+        </p:txBody>
+      </p:sp>
+      <p:sp>
+        <p:nvSpPr>
+          <p:cNvPr id="7" name="Rectangle 6"/>
+          <p:cNvSpPr/>
+          <p:nvPr/>
+        </p:nvSpPr>
+        <p:spPr>
+          <a:xfrm>
+            <a:off x="4566513" y="1737360"/>
+            <a:ext cx="457200" cy="54864"/>
+          </a:xfrm>
+          <a:prstGeom prst="rect">
+            <a:avLst/>
+          </a:prstGeom>
+          <a:solidFill>
+            <a:srgbClr val="F97316"/>
+          </a:solidFill>
+          <a:ln>
+            <a:noFill/>
+          </a:ln>
+        </p:spPr>
+        <p:style>
+          <a:lnRef idx="1">
+            <a:schemeClr val="accent1"/>
+          </a:lnRef>
+          <a:fillRef idx="3">
+            <a:schemeClr val="accent1"/>
+          </a:fillRef>
+          <a:effectRef idx="2">
+            <a:schemeClr val="accent1"/>
+          </a:effectRef>
+          <a:fontRef idx="minor">
+            <a:schemeClr val="lt1"/>
+          </a:fontRef>
+        </p:style>
+        <p:txBody>
+          <a:bodyPr rtlCol="0" anchor="ctr"/>
+          <a:lstStyle/>
+          <a:p>
+            <a:pPr algn="ctr"/>
+          </a:p>
+        </p:txBody>
+      </p:sp>
+      <p:sp>
+        <p:nvSpPr>
+          <p:cNvPr id="8" name="Rounded Rectangle 7"/>
+          <p:cNvSpPr/>
+          <p:nvPr/>
+        </p:nvSpPr>
+        <p:spPr>
+          <a:xfrm>
+            <a:off x="8036661" y="1554480"/>
+            <a:ext cx="3332073" cy="4389120"/>
+          </a:xfrm>
+          <a:prstGeom prst="roundRect">
+            <a:avLst/>
+          </a:prstGeom>
+          <a:solidFill>
+            <a:srgbClr val="F1F5F9"/>
+          </a:solidFill>
+          <a:ln w="12700">
+            <a:solidFill>
+              <a:srgbClr val="E2E8F0"/>
+            </a:solidFill>
+          </a:ln>
+        </p:spPr>
+        <p:style>
+          <a:lnRef idx="1">
+            <a:schemeClr val="accent1"/>
+          </a:lnRef>
+          <a:fillRef idx="3">
+            <a:schemeClr val="accent1"/>
+          </a:fillRef>
+          <a:effectRef idx="2">
+            <a:schemeClr val="accent1"/>
+          </a:effectRef>
+          <a:fontRef idx="minor">
+            <a:schemeClr val="lt1"/>
+          </a:fontRef>
+        </p:style>
+        <p:txBody>
+          <a:bodyPr rtlCol="0" anchor="ctr" wrap="square" lIns="228600" rIns="228600" tIns="457200"/>
+          <a:lstStyle/>
+          <a:p>
+            <a:pPr algn="l">
+              <a:spcAft>
+                <a:spcPts val="600"/>
+              </a:spcAft>
+              <a:defRPr sz="1400">
+                <a:solidFill>
+                  <a:srgbClr val="1E293B"/>
+                </a:solidFill>
+              </a:defRPr>
+            </a:pPr>
+            <a:r>
+              <a:t>Eliminates: Managers can't see what's actually happening</a:t>
+            </a:r>
+          </a:p>
+        </p:txBody>
+      </p:sp>
+      <p:sp>
+        <p:nvSpPr>
+          <p:cNvPr id="9" name="Rectangle 8"/>
+          <p:cNvSpPr/>
+          <p:nvPr/>
+        </p:nvSpPr>
+        <p:spPr>
+          <a:xfrm>
+            <a:off x="8173821" y="1737360"/>
+            <a:ext cx="457200" cy="54864"/>
+          </a:xfrm>
+          <a:prstGeom prst="rect">
+            <a:avLst/>
+          </a:prstGeom>
+          <a:solidFill>
+            <a:srgbClr val="F97316"/>
+          </a:solidFill>
+          <a:ln>
+            <a:noFill/>
+          </a:ln>
+        </p:spPr>
+        <p:style>
+          <a:lnRef idx="1">
+            <a:schemeClr val="accent1"/>
+          </a:lnRef>
+          <a:fillRef idx="3">
+            <a:schemeClr val="accent1"/>
+          </a:fillRef>
+          <a:effectRef idx="2">
+            <a:schemeClr val="accent1"/>
+          </a:effectRef>
+          <a:fontRef idx="minor">
+            <a:schemeClr val="lt1"/>
+          </a:fontRef>
+        </p:style>
+        <p:txBody>
+          <a:bodyPr rtlCol="0" anchor="ctr"/>
+          <a:lstStyle/>
+          <a:p>
+            <a:pPr algn="ctr"/>
           </a:p>
         </p:txBody>
       </p:sp>
@@ -3833,8 +4351,8 @@
         </p:nvSpPr>
         <p:spPr>
           <a:xfrm>
-            <a:off x="685800" y="365760"/>
-            <a:ext cx="10820095" cy="731520"/>
+            <a:off x="822960" y="457200"/>
+            <a:ext cx="10545775" cy="640080"/>
           </a:xfrm>
           <a:prstGeom prst="rect">
             <a:avLst/>
@@ -3863,14 +4381,57 @@
       </p:sp>
       <p:sp>
         <p:nvSpPr>
-          <p:cNvPr id="3" name="Rounded Rectangle 2"/>
+          <p:cNvPr id="3" name="Rectangle 2"/>
           <p:cNvSpPr/>
           <p:nvPr/>
         </p:nvSpPr>
         <p:spPr>
           <a:xfrm>
-            <a:off x="685800" y="1645920"/>
-            <a:ext cx="3301898" cy="4114800"/>
+            <a:off x="822960" y="1143000"/>
+            <a:ext cx="1828800" cy="36576"/>
+          </a:xfrm>
+          <a:prstGeom prst="rect">
+            <a:avLst/>
+          </a:prstGeom>
+          <a:solidFill>
+            <a:srgbClr val="F97316"/>
+          </a:solidFill>
+          <a:ln>
+            <a:noFill/>
+          </a:ln>
+        </p:spPr>
+        <p:style>
+          <a:lnRef idx="1">
+            <a:schemeClr val="accent1"/>
+          </a:lnRef>
+          <a:fillRef idx="3">
+            <a:schemeClr val="accent1"/>
+          </a:fillRef>
+          <a:effectRef idx="2">
+            <a:schemeClr val="accent1"/>
+          </a:effectRef>
+          <a:fontRef idx="minor">
+            <a:schemeClr val="lt1"/>
+          </a:fontRef>
+        </p:style>
+        <p:txBody>
+          <a:bodyPr rtlCol="0" anchor="ctr"/>
+          <a:lstStyle/>
+          <a:p>
+            <a:pPr algn="ctr"/>
+          </a:p>
+        </p:txBody>
+      </p:sp>
+      <p:sp>
+        <p:nvSpPr>
+          <p:cNvPr id="4" name="Rounded Rectangle 3"/>
+          <p:cNvSpPr/>
+          <p:nvPr/>
+        </p:nvSpPr>
+        <p:spPr>
+          <a:xfrm>
+            <a:off x="822960" y="1554480"/>
+            <a:ext cx="3332073" cy="4389120"/>
           </a:xfrm>
           <a:prstGeom prst="roundRect">
             <a:avLst/>
@@ -3899,11 +4460,14 @@
           </a:fontRef>
         </p:style>
         <p:txBody>
-          <a:bodyPr rtlCol="0" anchor="ctr" wrap="square" lIns="182880" rIns="182880" tIns="137160"/>
-          <a:lstStyle/>
-          <a:p>
-            <a:pPr algn="ctr">
-              <a:defRPr sz="1600">
+          <a:bodyPr rtlCol="0" anchor="ctr" wrap="square" lIns="228600" rIns="228600" tIns="457200"/>
+          <a:lstStyle/>
+          <a:p>
+            <a:pPr algn="l">
+              <a:spcAft>
+                <a:spcPts val="600"/>
+              </a:spcAft>
+              <a:defRPr sz="1400">
                 <a:solidFill>
                   <a:srgbClr val="1E293B"/>
                 </a:solidFill>
@@ -3917,14 +4481,57 @@
       </p:sp>
       <p:sp>
         <p:nvSpPr>
-          <p:cNvPr id="4" name="Rounded Rectangle 3"/>
+          <p:cNvPr id="5" name="Rectangle 4"/>
           <p:cNvSpPr/>
           <p:nvPr/>
         </p:nvSpPr>
         <p:spPr>
           <a:xfrm>
-            <a:off x="4444898" y="1645920"/>
-            <a:ext cx="3301898" cy="4114800"/>
+            <a:off x="960120" y="1737360"/>
+            <a:ext cx="457200" cy="54864"/>
+          </a:xfrm>
+          <a:prstGeom prst="rect">
+            <a:avLst/>
+          </a:prstGeom>
+          <a:solidFill>
+            <a:srgbClr val="F97316"/>
+          </a:solidFill>
+          <a:ln>
+            <a:noFill/>
+          </a:ln>
+        </p:spPr>
+        <p:style>
+          <a:lnRef idx="1">
+            <a:schemeClr val="accent1"/>
+          </a:lnRef>
+          <a:fillRef idx="3">
+            <a:schemeClr val="accent1"/>
+          </a:fillRef>
+          <a:effectRef idx="2">
+            <a:schemeClr val="accent1"/>
+          </a:effectRef>
+          <a:fontRef idx="minor">
+            <a:schemeClr val="lt1"/>
+          </a:fontRef>
+        </p:style>
+        <p:txBody>
+          <a:bodyPr rtlCol="0" anchor="ctr"/>
+          <a:lstStyle/>
+          <a:p>
+            <a:pPr algn="ctr"/>
+          </a:p>
+        </p:txBody>
+      </p:sp>
+      <p:sp>
+        <p:nvSpPr>
+          <p:cNvPr id="6" name="Rounded Rectangle 5"/>
+          <p:cNvSpPr/>
+          <p:nvPr/>
+        </p:nvSpPr>
+        <p:spPr>
+          <a:xfrm>
+            <a:off x="4429353" y="1554480"/>
+            <a:ext cx="3332073" cy="4389120"/>
           </a:xfrm>
           <a:prstGeom prst="roundRect">
             <a:avLst/>
@@ -3953,11 +4560,14 @@
           </a:fontRef>
         </p:style>
         <p:txBody>
-          <a:bodyPr rtlCol="0" anchor="ctr" wrap="square" lIns="182880" rIns="182880" tIns="137160"/>
-          <a:lstStyle/>
-          <a:p>
-            <a:pPr algn="ctr">
-              <a:defRPr sz="1600">
+          <a:bodyPr rtlCol="0" anchor="ctr" wrap="square" lIns="228600" rIns="228600" tIns="457200"/>
+          <a:lstStyle/>
+          <a:p>
+            <a:pPr algn="l">
+              <a:spcAft>
+                <a:spcPts val="600"/>
+              </a:spcAft>
+              <a:defRPr sz="1400">
                 <a:solidFill>
                   <a:srgbClr val="1E293B"/>
                 </a:solidFill>
@@ -3971,14 +4581,57 @@
       </p:sp>
       <p:sp>
         <p:nvSpPr>
-          <p:cNvPr id="5" name="Rounded Rectangle 4"/>
+          <p:cNvPr id="7" name="Rectangle 6"/>
           <p:cNvSpPr/>
           <p:nvPr/>
         </p:nvSpPr>
         <p:spPr>
           <a:xfrm>
-            <a:off x="8203996" y="1645920"/>
-            <a:ext cx="3301898" cy="4114800"/>
+            <a:off x="4566513" y="1737360"/>
+            <a:ext cx="457200" cy="54864"/>
+          </a:xfrm>
+          <a:prstGeom prst="rect">
+            <a:avLst/>
+          </a:prstGeom>
+          <a:solidFill>
+            <a:srgbClr val="F97316"/>
+          </a:solidFill>
+          <a:ln>
+            <a:noFill/>
+          </a:ln>
+        </p:spPr>
+        <p:style>
+          <a:lnRef idx="1">
+            <a:schemeClr val="accent1"/>
+          </a:lnRef>
+          <a:fillRef idx="3">
+            <a:schemeClr val="accent1"/>
+          </a:fillRef>
+          <a:effectRef idx="2">
+            <a:schemeClr val="accent1"/>
+          </a:effectRef>
+          <a:fontRef idx="minor">
+            <a:schemeClr val="lt1"/>
+          </a:fontRef>
+        </p:style>
+        <p:txBody>
+          <a:bodyPr rtlCol="0" anchor="ctr"/>
+          <a:lstStyle/>
+          <a:p>
+            <a:pPr algn="ctr"/>
+          </a:p>
+        </p:txBody>
+      </p:sp>
+      <p:sp>
+        <p:nvSpPr>
+          <p:cNvPr id="8" name="Rounded Rectangle 7"/>
+          <p:cNvSpPr/>
+          <p:nvPr/>
+        </p:nvSpPr>
+        <p:spPr>
+          <a:xfrm>
+            <a:off x="8036661" y="1554480"/>
+            <a:ext cx="3332073" cy="4389120"/>
           </a:xfrm>
           <a:prstGeom prst="roundRect">
             <a:avLst/>
@@ -4007,11 +4660,14 @@
           </a:fontRef>
         </p:style>
         <p:txBody>
-          <a:bodyPr rtlCol="0" anchor="ctr" wrap="square" lIns="182880" rIns="182880" tIns="137160"/>
-          <a:lstStyle/>
-          <a:p>
-            <a:pPr algn="ctr">
-              <a:defRPr sz="1600">
+          <a:bodyPr rtlCol="0" anchor="ctr" wrap="square" lIns="228600" rIns="228600" tIns="457200"/>
+          <a:lstStyle/>
+          <a:p>
+            <a:pPr algn="l">
+              <a:spcAft>
+                <a:spcPts val="600"/>
+              </a:spcAft>
+              <a:defRPr sz="1400">
                 <a:solidFill>
                   <a:srgbClr val="1E293B"/>
                 </a:solidFill>
@@ -4020,6 +4676,49 @@
             <a:r>
               <a:t>AI-powered optimization</a:t>
             </a:r>
+          </a:p>
+        </p:txBody>
+      </p:sp>
+      <p:sp>
+        <p:nvSpPr>
+          <p:cNvPr id="9" name="Rectangle 8"/>
+          <p:cNvSpPr/>
+          <p:nvPr/>
+        </p:nvSpPr>
+        <p:spPr>
+          <a:xfrm>
+            <a:off x="8173821" y="1737360"/>
+            <a:ext cx="457200" cy="54864"/>
+          </a:xfrm>
+          <a:prstGeom prst="rect">
+            <a:avLst/>
+          </a:prstGeom>
+          <a:solidFill>
+            <a:srgbClr val="F97316"/>
+          </a:solidFill>
+          <a:ln>
+            <a:noFill/>
+          </a:ln>
+        </p:spPr>
+        <p:style>
+          <a:lnRef idx="1">
+            <a:schemeClr val="accent1"/>
+          </a:lnRef>
+          <a:fillRef idx="3">
+            <a:schemeClr val="accent1"/>
+          </a:fillRef>
+          <a:effectRef idx="2">
+            <a:schemeClr val="accent1"/>
+          </a:effectRef>
+          <a:fontRef idx="minor">
+            <a:schemeClr val="lt1"/>
+          </a:fontRef>
+        </p:style>
+        <p:txBody>
+          <a:bodyPr rtlCol="0" anchor="ctr"/>
+          <a:lstStyle/>
+          <a:p>
+            <a:pPr algn="ctr"/>
           </a:p>
         </p:txBody>
       </p:sp>
@@ -4059,7 +4758,7 @@
         <p:spPr>
           <a:xfrm>
             <a:off x="0" y="0"/>
-            <a:ext cx="12191695" cy="73152"/>
+            <a:ext cx="12191695" cy="54864"/>
           </a:xfrm>
           <a:prstGeom prst="rect">
             <a:avLst/>
@@ -4095,22 +4794,22 @@
       </p:sp>
       <p:sp>
         <p:nvSpPr>
-          <p:cNvPr id="3" name="Rectangle 2"/>
+          <p:cNvPr id="3" name="Rounded Rectangle 2"/>
           <p:cNvSpPr/>
           <p:nvPr/>
         </p:nvSpPr>
         <p:spPr>
           <a:xfrm>
             <a:off x="0" y="0"/>
-            <a:ext cx="7315200" cy="6858000"/>
-          </a:xfrm>
-          <a:prstGeom prst="rect">
+            <a:ext cx="6858000" cy="6858000"/>
+          </a:xfrm>
+          <a:prstGeom prst="roundRect">
             <a:avLst/>
           </a:prstGeom>
           <a:solidFill>
             <a:srgbClr val="F1F5F9"/>
           </a:solidFill>
-          <a:ln>
+          <a:ln w="12700">
             <a:solidFill>
               <a:srgbClr val="E2E8F0"/>
             </a:solidFill>
@@ -4142,7 +4841,7 @@
               </a:defRPr>
             </a:pPr>
             <a:r>
-              <a:t>[图片: product demo screenshot interface]</a:t>
+              <a:t>product demo screenshot interface</a:t>
             </a:r>
           </a:p>
         </p:txBody>
@@ -4155,8 +4854,8 @@
         </p:nvSpPr>
         <p:spPr>
           <a:xfrm>
-            <a:off x="7619695" y="1371600"/>
-            <a:ext cx="4114800" cy="914400"/>
+            <a:off x="7315200" y="1371600"/>
+            <a:ext cx="4389120" cy="914400"/>
           </a:xfrm>
           <a:prstGeom prst="rect">
             <a:avLst/>
@@ -4191,8 +4890,8 @@
         </p:nvSpPr>
         <p:spPr>
           <a:xfrm>
-            <a:off x="7619695" y="2560320"/>
-            <a:ext cx="4114800" cy="3200400"/>
+            <a:off x="7315200" y="2560320"/>
+            <a:ext cx="4389120" cy="3200400"/>
           </a:xfrm>
           <a:prstGeom prst="rect">
             <a:avLst/>
@@ -4205,7 +4904,13 @@
           </a:bodyPr>
           <a:lstStyle/>
           <a:p>
-            <a:pPr algn="l">
+            <a:pPr lvl="1" algn="l">
+              <a:spcBef>
+                <a:spcPts val="400"/>
+              </a:spcBef>
+              <a:spcAft>
+                <a:spcPts val="800"/>
+              </a:spcAft>
               <a:defRPr sz="1600" b="0">
                 <a:solidFill>
                   <a:srgbClr val="1E293B"/>
@@ -4214,15 +4919,45 @@
               </a:defRPr>
             </a:pPr>
             <a:r>
-              <a:t>• Step 1: Connect your data sources with one click</a:t>
-            </a:r>
-            <a:br/>
-            <a:r>
-              <a:t>• Step 2: Configure intelligent workflows visually</a:t>
-            </a:r>
-            <a:br/>
-            <a:r>
-              <a:t>• Step 3: Watch AI optimize and deliver results</a:t>
+              <a:t>Step 1: Connect your data sources with one click</a:t>
+            </a:r>
+          </a:p>
+          <a:p>
+            <a:pPr lvl="1" algn="l">
+              <a:spcBef>
+                <a:spcPts val="400"/>
+              </a:spcBef>
+              <a:spcAft>
+                <a:spcPts val="800"/>
+              </a:spcAft>
+              <a:defRPr sz="1600" b="0">
+                <a:solidFill>
+                  <a:srgbClr val="1E293B"/>
+                </a:solidFill>
+                <a:latin typeface="Inter"/>
+              </a:defRPr>
+            </a:pPr>
+            <a:r>
+              <a:t>Step 2: Configure intelligent workflows visually</a:t>
+            </a:r>
+          </a:p>
+          <a:p>
+            <a:pPr lvl="1" algn="l">
+              <a:spcBef>
+                <a:spcPts val="400"/>
+              </a:spcBef>
+              <a:spcAft>
+                <a:spcPts val="800"/>
+              </a:spcAft>
+              <a:defRPr sz="1600" b="0">
+                <a:solidFill>
+                  <a:srgbClr val="1E293B"/>
+                </a:solidFill>
+                <a:latin typeface="Inter"/>
+              </a:defRPr>
+            </a:pPr>
+            <a:r>
+              <a:t>Step 3: Watch AI optimize and deliver results</a:t>
             </a:r>
           </a:p>
         </p:txBody>
@@ -4262,8 +4997,8 @@
         </p:nvSpPr>
         <p:spPr>
           <a:xfrm>
-            <a:off x="685800" y="365760"/>
-            <a:ext cx="10820095" cy="731520"/>
+            <a:off x="914400" y="1371600"/>
+            <a:ext cx="1371600" cy="1371600"/>
           </a:xfrm>
           <a:prstGeom prst="rect">
             <a:avLst/>
@@ -4277,15 +5012,14 @@
           <a:lstStyle/>
           <a:p>
             <a:pPr algn="l">
-              <a:defRPr sz="2800" b="1">
+              <a:defRPr sz="7200" b="1">
                 <a:solidFill>
-                  <a:srgbClr val="1E293B"/>
+                  <a:srgbClr val="F97316"/>
                 </a:solidFill>
-                <a:latin typeface="Inter"/>
               </a:defRPr>
             </a:pPr>
             <a:r>
-              <a:t>Trusted by industry leaders</a:t>
+              <a:t>“</a:t>
             </a:r>
           </a:p>
         </p:txBody>
@@ -4298,8 +5032,8 @@
         </p:nvSpPr>
         <p:spPr>
           <a:xfrm>
-            <a:off x="685800" y="1371600"/>
-            <a:ext cx="10820095" cy="4572000"/>
+            <a:off x="1371600" y="2103120"/>
+            <a:ext cx="9448495" cy="2286000"/>
           </a:xfrm>
           <a:prstGeom prst="rect">
             <a:avLst/>
@@ -4313,7 +5047,7 @@
           <a:lstStyle/>
           <a:p>
             <a:pPr algn="l">
-              <a:defRPr sz="1600" b="0">
+              <a:defRPr sz="2200" b="0">
                 <a:solidFill>
                   <a:srgbClr val="1E293B"/>
                 </a:solidFill>
@@ -4321,15 +5055,43 @@
               </a:defRPr>
             </a:pPr>
             <a:r>
-              <a:t>• Reduced processing time by 85% within first month</a:t>
-            </a:r>
-            <a:br/>
-            <a:r>
-              <a:t>• Saved $1.2M annually in operational costs</a:t>
-            </a:r>
-            <a:br/>
-            <a:r>
-              <a:t>• Team satisfaction scores increased by 40%</a:t>
+              <a:t>This platform transformed how we operate. We went from weeks of manual work to minutes.</a:t>
+            </a:r>
+          </a:p>
+        </p:txBody>
+      </p:sp>
+      <p:sp>
+        <p:nvSpPr>
+          <p:cNvPr id="4" name="TextBox 3"/>
+          <p:cNvSpPr txBox="1"/>
+          <p:nvPr/>
+        </p:nvSpPr>
+        <p:spPr>
+          <a:xfrm>
+            <a:off x="1371600" y="4754880"/>
+            <a:ext cx="9448495" cy="548640"/>
+          </a:xfrm>
+          <a:prstGeom prst="rect">
+            <a:avLst/>
+          </a:prstGeom>
+          <a:noFill/>
+        </p:spPr>
+        <p:txBody>
+          <a:bodyPr wrap="square">
+            <a:spAutoFit/>
+          </a:bodyPr>
+          <a:lstStyle/>
+          <a:p>
+            <a:pPr algn="l">
+              <a:defRPr sz="1400" b="1">
+                <a:solidFill>
+                  <a:srgbClr val="94A3B8"/>
+                </a:solidFill>
+                <a:latin typeface="Inter"/>
+              </a:defRPr>
+            </a:pPr>
+            <a:r>
+              <a:t>VP of Operations, Fortune 500 Company</a:t>
             </a:r>
           </a:p>
         </p:txBody>
@@ -4363,14 +5125,57 @@
       <p:grpSpPr/>
       <p:sp>
         <p:nvSpPr>
-          <p:cNvPr id="2" name="TextBox 1"/>
+          <p:cNvPr id="2" name="Rectangle 1"/>
+          <p:cNvSpPr/>
+          <p:nvPr/>
+        </p:nvSpPr>
+        <p:spPr>
+          <a:xfrm>
+            <a:off x="0" y="0"/>
+            <a:ext cx="12191695" cy="54864"/>
+          </a:xfrm>
+          <a:prstGeom prst="rect">
+            <a:avLst/>
+          </a:prstGeom>
+          <a:solidFill>
+            <a:srgbClr val="F97316"/>
+          </a:solidFill>
+          <a:ln>
+            <a:noFill/>
+          </a:ln>
+        </p:spPr>
+        <p:style>
+          <a:lnRef idx="1">
+            <a:schemeClr val="accent1"/>
+          </a:lnRef>
+          <a:fillRef idx="3">
+            <a:schemeClr val="accent1"/>
+          </a:fillRef>
+          <a:effectRef idx="2">
+            <a:schemeClr val="accent1"/>
+          </a:effectRef>
+          <a:fontRef idx="minor">
+            <a:schemeClr val="lt1"/>
+          </a:fontRef>
+        </p:style>
+        <p:txBody>
+          <a:bodyPr rtlCol="0" anchor="ctr"/>
+          <a:lstStyle/>
+          <a:p>
+            <a:pPr algn="ctr"/>
+          </a:p>
+        </p:txBody>
+      </p:sp>
+      <p:sp>
+        <p:nvSpPr>
+          <p:cNvPr id="3" name="TextBox 2"/>
           <p:cNvSpPr txBox="1"/>
           <p:nvPr/>
         </p:nvSpPr>
         <p:spPr>
           <a:xfrm>
-            <a:off x="685800" y="365760"/>
-            <a:ext cx="10820095" cy="731520"/>
+            <a:off x="1371600" y="1828800"/>
+            <a:ext cx="9448495" cy="1097280"/>
           </a:xfrm>
           <a:prstGeom prst="rect">
             <a:avLst/>
@@ -4383,8 +5188,8 @@
           </a:bodyPr>
           <a:lstStyle/>
           <a:p>
-            <a:pPr algn="l">
-              <a:defRPr sz="2800" b="1">
+            <a:pPr algn="ctr">
+              <a:defRPr sz="4000" b="1">
                 <a:solidFill>
                   <a:srgbClr val="1E293B"/>
                 </a:solidFill>
@@ -4399,14 +5204,14 @@
       </p:sp>
       <p:sp>
         <p:nvSpPr>
-          <p:cNvPr id="3" name="TextBox 2"/>
+          <p:cNvPr id="4" name="TextBox 3"/>
           <p:cNvSpPr txBox="1"/>
           <p:nvPr/>
         </p:nvSpPr>
         <p:spPr>
           <a:xfrm>
-            <a:off x="685800" y="1371600"/>
-            <a:ext cx="10820095" cy="4572000"/>
+            <a:off x="2286000" y="3200400"/>
+            <a:ext cx="7619695" cy="640080"/>
           </a:xfrm>
           <a:prstGeom prst="rect">
             <a:avLst/>
@@ -4419,24 +5224,75 @@
           </a:bodyPr>
           <a:lstStyle/>
           <a:p>
-            <a:pPr algn="l">
-              <a:defRPr sz="1600" b="0">
+            <a:pPr algn="ctr">
+              <a:defRPr sz="1800" b="0">
                 <a:solidFill>
-                  <a:srgbClr val="1E293B"/>
+                  <a:srgbClr val="94A3B8"/>
                 </a:solidFill>
                 <a:latin typeface="Inter"/>
               </a:defRPr>
             </a:pPr>
             <a:r>
-              <a:t>• Starter: Free for teams up to 5 — full features</a:t>
-            </a:r>
-            <a:br/>
-            <a:r>
-              <a:t>• Pro: $29/user/mo — advanced automation + priority support</a:t>
-            </a:r>
-            <a:br/>
-            <a:r>
-              <a:t>• Enterprise: Custom — SSO, audit logs, dedicated CSM</a:t>
+              <a:t>Start free. Scale as you grow.</a:t>
+            </a:r>
+          </a:p>
+        </p:txBody>
+      </p:sp>
+      <p:sp>
+        <p:nvSpPr>
+          <p:cNvPr id="5" name="Rounded Rectangle 4"/>
+          <p:cNvSpPr/>
+          <p:nvPr/>
+        </p:nvSpPr>
+        <p:spPr>
+          <a:xfrm>
+            <a:off x="4267504" y="4389120"/>
+            <a:ext cx="3657600" cy="731520"/>
+          </a:xfrm>
+          <a:prstGeom prst="roundRect">
+            <a:avLst/>
+          </a:prstGeom>
+          <a:solidFill>
+            <a:srgbClr val="2563EB"/>
+          </a:solidFill>
+          <a:ln>
+            <a:noFill/>
+          </a:ln>
+          <a:effectLst>
+            <a:outerShdw blurRad="101600" dist="38100" dir="5400000" algn="tl" rotWithShape="0">
+              <a:srgbClr val="000000">
+                <a:alpha val="20000"/>
+              </a:srgbClr>
+            </a:outerShdw>
+          </a:effectLst>
+        </p:spPr>
+        <p:style>
+          <a:lnRef idx="1">
+            <a:schemeClr val="accent1"/>
+          </a:lnRef>
+          <a:fillRef idx="3">
+            <a:schemeClr val="accent1"/>
+          </a:fillRef>
+          <a:effectRef idx="2">
+            <a:schemeClr val="accent1"/>
+          </a:effectRef>
+          <a:fontRef idx="minor">
+            <a:schemeClr val="lt1"/>
+          </a:fontRef>
+        </p:style>
+        <p:txBody>
+          <a:bodyPr rtlCol="0" anchor="ctr" wrap="square"/>
+          <a:lstStyle/>
+          <a:p>
+            <a:pPr algn="ctr">
+              <a:defRPr sz="1800" b="1">
+                <a:solidFill>
+                  <a:srgbClr val="FFFFFF"/>
+                </a:solidFill>
+              </a:defRPr>
+            </a:pPr>
+            <a:r>
+              <a:t>Simple, transparent pricing</a:t>
             </a:r>
           </a:p>
         </p:txBody>
@@ -4470,14 +5326,57 @@
       <p:grpSpPr/>
       <p:sp>
         <p:nvSpPr>
-          <p:cNvPr id="2" name="TextBox 1"/>
+          <p:cNvPr id="2" name="Rectangle 1"/>
+          <p:cNvSpPr/>
+          <p:nvPr/>
+        </p:nvSpPr>
+        <p:spPr>
+          <a:xfrm>
+            <a:off x="0" y="0"/>
+            <a:ext cx="12191695" cy="54864"/>
+          </a:xfrm>
+          <a:prstGeom prst="rect">
+            <a:avLst/>
+          </a:prstGeom>
+          <a:solidFill>
+            <a:srgbClr val="F97316"/>
+          </a:solidFill>
+          <a:ln>
+            <a:noFill/>
+          </a:ln>
+        </p:spPr>
+        <p:style>
+          <a:lnRef idx="1">
+            <a:schemeClr val="accent1"/>
+          </a:lnRef>
+          <a:fillRef idx="3">
+            <a:schemeClr val="accent1"/>
+          </a:fillRef>
+          <a:effectRef idx="2">
+            <a:schemeClr val="accent1"/>
+          </a:effectRef>
+          <a:fontRef idx="minor">
+            <a:schemeClr val="lt1"/>
+          </a:fontRef>
+        </p:style>
+        <p:txBody>
+          <a:bodyPr rtlCol="0" anchor="ctr"/>
+          <a:lstStyle/>
+          <a:p>
+            <a:pPr algn="ctr"/>
+          </a:p>
+        </p:txBody>
+      </p:sp>
+      <p:sp>
+        <p:nvSpPr>
+          <p:cNvPr id="3" name="TextBox 2"/>
           <p:cNvSpPr txBox="1"/>
           <p:nvPr/>
         </p:nvSpPr>
         <p:spPr>
           <a:xfrm>
             <a:off x="1371600" y="1828800"/>
-            <a:ext cx="9448495" cy="1371600"/>
+            <a:ext cx="9448495" cy="1097280"/>
           </a:xfrm>
           <a:prstGeom prst="rect">
             <a:avLst/>
@@ -4491,7 +5390,7 @@
           <a:lstStyle/>
           <a:p>
             <a:pPr algn="ctr">
-              <a:defRPr sz="4400" b="1">
+              <a:defRPr sz="4000" b="1">
                 <a:solidFill>
                   <a:srgbClr val="1E293B"/>
                 </a:solidFill>
@@ -4506,14 +5405,14 @@
       </p:sp>
       <p:sp>
         <p:nvSpPr>
-          <p:cNvPr id="3" name="TextBox 2"/>
+          <p:cNvPr id="4" name="TextBox 3"/>
           <p:cNvSpPr txBox="1"/>
           <p:nvPr/>
         </p:nvSpPr>
         <p:spPr>
           <a:xfrm>
-            <a:off x="2286000" y="3474720"/>
-            <a:ext cx="7619695" cy="731520"/>
+            <a:off x="2286000" y="3200400"/>
+            <a:ext cx="7619695" cy="640080"/>
           </a:xfrm>
           <a:prstGeom prst="rect">
             <a:avLst/>
@@ -4527,7 +5426,7 @@
           <a:lstStyle/>
           <a:p>
             <a:pPr algn="ctr">
-              <a:defRPr sz="2000" b="0">
+              <a:defRPr sz="1800" b="0">
                 <a:solidFill>
                   <a:srgbClr val="94A3B8"/>
                 </a:solidFill>
@@ -4542,13 +5441,13 @@
       </p:sp>
       <p:sp>
         <p:nvSpPr>
-          <p:cNvPr id="4" name="Rounded Rectangle 3"/>
+          <p:cNvPr id="5" name="Rounded Rectangle 4"/>
           <p:cNvSpPr/>
           <p:nvPr/>
         </p:nvSpPr>
         <p:spPr>
           <a:xfrm>
-            <a:off x="4267504" y="4572000"/>
+            <a:off x="4267504" y="4389120"/>
             <a:ext cx="3657600" cy="731520"/>
           </a:xfrm>
           <a:prstGeom prst="roundRect">
@@ -4561,9 +5460,9 @@
             <a:noFill/>
           </a:ln>
           <a:effectLst>
-            <a:outerShdw blurRad="76200" dist="38100" dir="5400000" algn="tl" rotWithShape="0">
+            <a:outerShdw blurRad="101600" dist="38100" dir="5400000" algn="tl" rotWithShape="0">
               <a:srgbClr val="000000">
-                <a:alpha val="25000"/>
+                <a:alpha val="20000"/>
               </a:srgbClr>
             </a:outerShdw>
           </a:effectLst>

--- a/examples/02-saas-product-demo.pptx
+++ b/examples/02-saas-product-demo.pptx
@@ -3530,60 +3530,30 @@
           </a:p>
         </p:txBody>
       </p:sp>
-      <p:sp>
-        <p:nvSpPr>
-          <p:cNvPr id="5" name="Rounded Rectangle 4"/>
-          <p:cNvSpPr/>
+      <p:pic>
+        <p:nvPicPr>
+          <p:cNvPr id="5" name="Picture 4" descr="d06affc47b48ae94b587c226d56762b7.png"/>
+          <p:cNvPicPr>
+            <a:picLocks noChangeAspect="1"/>
+          </p:cNvPicPr>
           <p:nvPr/>
-        </p:nvSpPr>
+        </p:nvPicPr>
+        <p:blipFill>
+          <a:blip r:embed="rId2"/>
+          <a:stretch>
+            <a:fillRect/>
+          </a:stretch>
+        </p:blipFill>
         <p:spPr>
           <a:xfrm>
             <a:off x="5410504" y="365760"/>
             <a:ext cx="1371600" cy="457200"/>
           </a:xfrm>
-          <a:prstGeom prst="roundRect">
+          <a:prstGeom prst="rect">
             <a:avLst/>
           </a:prstGeom>
-          <a:solidFill>
-            <a:srgbClr val="F1F5F9"/>
-          </a:solidFill>
-          <a:ln w="12700">
-            <a:solidFill>
-              <a:srgbClr val="E2E8F0"/>
-            </a:solidFill>
-          </a:ln>
-        </p:spPr>
-        <p:style>
-          <a:lnRef idx="1">
-            <a:schemeClr val="accent1"/>
-          </a:lnRef>
-          <a:fillRef idx="3">
-            <a:schemeClr val="accent1"/>
-          </a:fillRef>
-          <a:effectRef idx="2">
-            <a:schemeClr val="accent1"/>
-          </a:effectRef>
-          <a:fontRef idx="minor">
-            <a:schemeClr val="lt1"/>
-          </a:fontRef>
-        </p:style>
-        <p:txBody>
-          <a:bodyPr rtlCol="0" anchor="ctr" wrap="square"/>
-          <a:lstStyle/>
-          <a:p>
-            <a:pPr algn="ctr">
-              <a:defRPr sz="1200">
-                <a:solidFill>
-                  <a:srgbClr val="94A3B8"/>
-                </a:solidFill>
-              </a:defRPr>
-            </a:pPr>
-            <a:r>
-              <a:t>abstract technology innovation</a:t>
-            </a:r>
-          </a:p>
-        </p:txBody>
-      </p:sp>
+        </p:spPr>
+      </p:pic>
     </p:spTree>
   </p:cSld>
   <p:clrMapOvr>
@@ -3856,60 +3826,30 @@
           </a:p>
         </p:txBody>
       </p:sp>
-      <p:sp>
-        <p:nvSpPr>
-          <p:cNvPr id="7" name="Rounded Rectangle 6"/>
-          <p:cNvSpPr/>
+      <p:pic>
+        <p:nvPicPr>
+          <p:cNvPr id="7" name="Picture 6" descr="e3568e1f21f43d0e79e748becdd72c4c.png"/>
+          <p:cNvPicPr>
+            <a:picLocks noChangeAspect="1"/>
+          </p:cNvPicPr>
           <p:nvPr/>
-        </p:nvSpPr>
+        </p:nvPicPr>
+        <p:blipFill>
+          <a:blip r:embed="rId2"/>
+          <a:stretch>
+            <a:fillRect/>
+          </a:stretch>
+        </p:blipFill>
         <p:spPr>
           <a:xfrm>
             <a:off x="7772400" y="1463040"/>
             <a:ext cx="3657600" cy="4572000"/>
           </a:xfrm>
-          <a:prstGeom prst="roundRect">
+          <a:prstGeom prst="rect">
             <a:avLst/>
           </a:prstGeom>
-          <a:solidFill>
-            <a:srgbClr val="F1F5F9"/>
-          </a:solidFill>
-          <a:ln w="12700">
-            <a:solidFill>
-              <a:srgbClr val="E2E8F0"/>
-            </a:solidFill>
-          </a:ln>
-        </p:spPr>
-        <p:style>
-          <a:lnRef idx="1">
-            <a:schemeClr val="accent1"/>
-          </a:lnRef>
-          <a:fillRef idx="3">
-            <a:schemeClr val="accent1"/>
-          </a:fillRef>
-          <a:effectRef idx="2">
-            <a:schemeClr val="accent1"/>
-          </a:effectRef>
-          <a:fontRef idx="minor">
-            <a:schemeClr val="lt1"/>
-          </a:fontRef>
-        </p:style>
-        <p:txBody>
-          <a:bodyPr rtlCol="0" anchor="ctr" wrap="square"/>
-          <a:lstStyle/>
-          <a:p>
-            <a:pPr algn="ctr">
-              <a:defRPr sz="1200">
-                <a:solidFill>
-                  <a:srgbClr val="94A3B8"/>
-                </a:solidFill>
-              </a:defRPr>
-            </a:pPr>
-            <a:r>
-              <a:t>frustration stress problem dark</a:t>
-            </a:r>
-          </a:p>
-        </p:txBody>
-      </p:sp>
+        </p:spPr>
+      </p:pic>
     </p:spTree>
   </p:cSld>
   <p:clrMapOvr>
@@ -4792,60 +4732,30 @@
           </a:p>
         </p:txBody>
       </p:sp>
-      <p:sp>
-        <p:nvSpPr>
-          <p:cNvPr id="3" name="Rounded Rectangle 2"/>
-          <p:cNvSpPr/>
+      <p:pic>
+        <p:nvPicPr>
+          <p:cNvPr id="3" name="Picture 2" descr="37ae97a72a8fe86873240d7d8c112965.png"/>
+          <p:cNvPicPr>
+            <a:picLocks noChangeAspect="1"/>
+          </p:cNvPicPr>
           <p:nvPr/>
-        </p:nvSpPr>
+        </p:nvPicPr>
+        <p:blipFill>
+          <a:blip r:embed="rId2"/>
+          <a:stretch>
+            <a:fillRect/>
+          </a:stretch>
+        </p:blipFill>
         <p:spPr>
           <a:xfrm>
             <a:off x="0" y="0"/>
             <a:ext cx="6858000" cy="6858000"/>
           </a:xfrm>
-          <a:prstGeom prst="roundRect">
+          <a:prstGeom prst="rect">
             <a:avLst/>
           </a:prstGeom>
-          <a:solidFill>
-            <a:srgbClr val="F1F5F9"/>
-          </a:solidFill>
-          <a:ln w="12700">
-            <a:solidFill>
-              <a:srgbClr val="E2E8F0"/>
-            </a:solidFill>
-          </a:ln>
-        </p:spPr>
-        <p:style>
-          <a:lnRef idx="1">
-            <a:schemeClr val="accent1"/>
-          </a:lnRef>
-          <a:fillRef idx="3">
-            <a:schemeClr val="accent1"/>
-          </a:fillRef>
-          <a:effectRef idx="2">
-            <a:schemeClr val="accent1"/>
-          </a:effectRef>
-          <a:fontRef idx="minor">
-            <a:schemeClr val="lt1"/>
-          </a:fontRef>
-        </p:style>
-        <p:txBody>
-          <a:bodyPr rtlCol="0" anchor="ctr" wrap="square"/>
-          <a:lstStyle/>
-          <a:p>
-            <a:pPr algn="ctr">
-              <a:defRPr sz="1200">
-                <a:solidFill>
-                  <a:srgbClr val="94A3B8"/>
-                </a:solidFill>
-              </a:defRPr>
-            </a:pPr>
-            <a:r>
-              <a:t>product demo screenshot interface</a:t>
-            </a:r>
-          </a:p>
-        </p:txBody>
-      </p:sp>
+        </p:spPr>
+      </p:pic>
       <p:sp>
         <p:nvSpPr>
           <p:cNvPr id="4" name="TextBox 3"/>
